--- a/index/designs/y7-l10/l6-asking-time/l6-asking-time.pptx
+++ b/index/designs/y7-l10/l6-asking-time/l6-asking-time.pptx
@@ -2922,9 +2922,6 @@
               </a:rPr>
               <a:t>Ask: </a:t>
             </a:r>
-            <a:pPr algn="l" indent="0" marL="0">
-              <a:buNone/>
-            </a:pPr>
             <a:r>
               <a:rPr lang="en-US" sz="1000" b="1" dirty="0">
                 <a:solidFill>
@@ -26284,9 +26281,6 @@
               </a:rPr>
               <a:t>No repeating times.</a:t>
             </a:r>
-            <a:pPr algn="l" indent="0" marL="0">
-              <a:buNone/>
-            </a:pPr>
             <a:r>
               <a:rPr lang="en-US" sz="900" dirty="0">
                 <a:solidFill>
@@ -26415,9 +26409,6 @@
               </a:rPr>
               <a:t>No same pattern twice in a row.</a:t>
             </a:r>
-            <a:pPr algn="l" indent="0" marL="0">
-              <a:buNone/>
-            </a:pPr>
             <a:r>
               <a:rPr lang="en-US" sz="900" dirty="0">
                 <a:solidFill>
@@ -26546,9 +26537,6 @@
               </a:rPr>
               <a:t>Listen carefully.</a:t>
             </a:r>
-            <a:pPr algn="l" indent="0" marL="0">
-              <a:buNone/>
-            </a:pPr>
             <a:r>
               <a:rPr lang="en-US" sz="900" dirty="0">
                 <a:solidFill>
@@ -26677,9 +26665,6 @@
               </a:rPr>
               <a:t>Keep it moving.</a:t>
             </a:r>
-            <a:pPr algn="l" indent="0" marL="0">
-              <a:buNone/>
-            </a:pPr>
             <a:r>
               <a:rPr lang="en-US" sz="900" dirty="0">
                 <a:solidFill>
